--- a/3D AGROBOT_.pptx
+++ b/3D AGROBOT_.pptx
@@ -11715,7 +11715,82 @@
               </a:rPr>
               <a:t>Raspberry Pi 4 8GB RAM</a:t>
             </a:r>
+            <a:endParaRPr lang="bg-BG" sz="1600" dirty="0">
+              <a:solidFill>
+                <a:schemeClr val="bg1"/>
+              </a:solidFill>
+              <a:latin typeface="Calibri Light" panose="020F0302020204030204" pitchFamily="34" charset="0"/>
+              <a:ea typeface="Calibri Light" panose="020F0302020204030204" pitchFamily="34" charset="0"/>
+              <a:cs typeface="Calibri Light" panose="020F0302020204030204" pitchFamily="34" charset="0"/>
+            </a:endParaRPr>
+          </a:p>
+          <a:p>
+            <a:pPr marL="457200" lvl="1" indent="0">
+              <a:buNone/>
+            </a:pPr>
+            <a:endParaRPr lang="bg-BG" sz="1600" dirty="0">
+              <a:solidFill>
+                <a:schemeClr val="bg1"/>
+              </a:solidFill>
+            </a:endParaRPr>
+          </a:p>
+          <a:p>
+            <a:pPr marL="457200" lvl="1" indent="0">
+              <a:buNone/>
+            </a:pPr>
+            <a:endParaRPr lang="bg-BG" sz="1600" dirty="0">
+              <a:solidFill>
+                <a:schemeClr val="bg1"/>
+              </a:solidFill>
+            </a:endParaRPr>
+          </a:p>
+          <a:p>
+            <a:pPr marL="457200" lvl="1" indent="0">
+              <a:buNone/>
+            </a:pPr>
+            <a:endParaRPr lang="bg-BG" sz="1600" dirty="0">
+              <a:solidFill>
+                <a:schemeClr val="bg1"/>
+              </a:solidFill>
+            </a:endParaRPr>
+          </a:p>
+          <a:p>
+            <a:pPr marL="457200" lvl="1" indent="0">
+              <a:buNone/>
+            </a:pPr>
+            <a:r>
+              <a:rPr lang="bg-BG" sz="1600" dirty="0">
+                <a:solidFill>
+                  <a:schemeClr val="bg1"/>
+                </a:solidFill>
+              </a:rPr>
+              <a:t>Чертеж:</a:t>
+            </a:r>
             <a:br>
+              <a:rPr lang="bg-BG" sz="1600" dirty="0">
+                <a:solidFill>
+                  <a:schemeClr val="bg1"/>
+                </a:solidFill>
+              </a:rPr>
+            </a:br>
+            <a:r>
+              <a:rPr lang="bg-BG" sz="1600" dirty="0">
+                <a:solidFill>
+                  <a:schemeClr val="bg1"/>
+                </a:solidFill>
+              </a:rPr>
+              <a:t>     </a:t>
+            </a:r>
+            <a:r>
+              <a:rPr lang="en-US" sz="1600" dirty="0">
+                <a:solidFill>
+                  <a:schemeClr val="bg1"/>
+                </a:solidFill>
+                <a:hlinkClick r:id="rId3"/>
+              </a:rPr>
+              <a:t>https://app.cirkitdesigner.com/project/9816c1a6-c178-4cb5-b0e1-b71774cdae0e</a:t>
+            </a:r>
+            <a:r>
               <a:rPr lang="bg-BG" sz="1600" dirty="0">
                 <a:solidFill>
                   <a:schemeClr val="bg1"/>
@@ -11724,7 +11799,8 @@
                 <a:ea typeface="Calibri Light" panose="020F0302020204030204" pitchFamily="34" charset="0"/>
                 <a:cs typeface="Calibri Light" panose="020F0302020204030204" pitchFamily="34" charset="0"/>
               </a:rPr>
-            </a:br>
+              <a:t> </a:t>
+            </a:r>
             <a:endParaRPr lang="en-GB" sz="1600" dirty="0">
               <a:solidFill>
                 <a:schemeClr val="bg1"/>
@@ -11751,7 +11827,7 @@
           <p:nvPr/>
         </p:nvPicPr>
         <p:blipFill>
-          <a:blip r:embed="rId3">
+          <a:blip r:embed="rId4">
             <a:extLst>
               <a:ext uri="{28A0092B-C50C-407E-A947-70E740481C1C}">
                 <a14:useLocalDpi xmlns:a14="http://schemas.microsoft.com/office/drawing/2010/main" val="0"/>
